--- a/Dungeon-crawl-C#.pptx
+++ b/Dungeon-crawl-C#.pptx
@@ -111,6 +111,11 @@
       </a:defRPr>
     </a:lvl9pPr>
   </p:defaultTextStyle>
+  <p:extLst>
+    <p:ext uri="{EFAFB233-063F-42B5-8137-9DF3F51BA10A}">
+      <p15:sldGuideLst xmlns:p15="http://schemas.microsoft.com/office/powerpoint/2012/main"/>
+    </p:ext>
+  </p:extLst>
 </p:presentation>
 </file>
 
@@ -263,7 +268,7 @@
           <a:p>
             <a:fld id="{3C21C414-9264-472F-8F44-4AC08CBAF0ED}" type="datetimeFigureOut">
               <a:rPr lang="hu-HU" smtClean="0"/>
-              <a:t>2025. 06. 15.</a:t>
+              <a:t>2025. 06. 16.</a:t>
             </a:fld>
             <a:endParaRPr lang="hu-HU"/>
           </a:p>
@@ -463,7 +468,7 @@
           <a:p>
             <a:fld id="{3C21C414-9264-472F-8F44-4AC08CBAF0ED}" type="datetimeFigureOut">
               <a:rPr lang="hu-HU" smtClean="0"/>
-              <a:t>2025. 06. 15.</a:t>
+              <a:t>2025. 06. 16.</a:t>
             </a:fld>
             <a:endParaRPr lang="hu-HU"/>
           </a:p>
@@ -673,7 +678,7 @@
           <a:p>
             <a:fld id="{3C21C414-9264-472F-8F44-4AC08CBAF0ED}" type="datetimeFigureOut">
               <a:rPr lang="hu-HU" smtClean="0"/>
-              <a:t>2025. 06. 15.</a:t>
+              <a:t>2025. 06. 16.</a:t>
             </a:fld>
             <a:endParaRPr lang="hu-HU"/>
           </a:p>
@@ -873,7 +878,7 @@
           <a:p>
             <a:fld id="{3C21C414-9264-472F-8F44-4AC08CBAF0ED}" type="datetimeFigureOut">
               <a:rPr lang="hu-HU" smtClean="0"/>
-              <a:t>2025. 06. 15.</a:t>
+              <a:t>2025. 06. 16.</a:t>
             </a:fld>
             <a:endParaRPr lang="hu-HU"/>
           </a:p>
@@ -1149,7 +1154,7 @@
           <a:p>
             <a:fld id="{3C21C414-9264-472F-8F44-4AC08CBAF0ED}" type="datetimeFigureOut">
               <a:rPr lang="hu-HU" smtClean="0"/>
-              <a:t>2025. 06. 15.</a:t>
+              <a:t>2025. 06. 16.</a:t>
             </a:fld>
             <a:endParaRPr lang="hu-HU"/>
           </a:p>
@@ -1417,7 +1422,7 @@
           <a:p>
             <a:fld id="{3C21C414-9264-472F-8F44-4AC08CBAF0ED}" type="datetimeFigureOut">
               <a:rPr lang="hu-HU" smtClean="0"/>
-              <a:t>2025. 06. 15.</a:t>
+              <a:t>2025. 06. 16.</a:t>
             </a:fld>
             <a:endParaRPr lang="hu-HU"/>
           </a:p>
@@ -1832,7 +1837,7 @@
           <a:p>
             <a:fld id="{3C21C414-9264-472F-8F44-4AC08CBAF0ED}" type="datetimeFigureOut">
               <a:rPr lang="hu-HU" smtClean="0"/>
-              <a:t>2025. 06. 15.</a:t>
+              <a:t>2025. 06. 16.</a:t>
             </a:fld>
             <a:endParaRPr lang="hu-HU"/>
           </a:p>
@@ -1974,7 +1979,7 @@
           <a:p>
             <a:fld id="{3C21C414-9264-472F-8F44-4AC08CBAF0ED}" type="datetimeFigureOut">
               <a:rPr lang="hu-HU" smtClean="0"/>
-              <a:t>2025. 06. 15.</a:t>
+              <a:t>2025. 06. 16.</a:t>
             </a:fld>
             <a:endParaRPr lang="hu-HU"/>
           </a:p>
@@ -2087,7 +2092,7 @@
           <a:p>
             <a:fld id="{3C21C414-9264-472F-8F44-4AC08CBAF0ED}" type="datetimeFigureOut">
               <a:rPr lang="hu-HU" smtClean="0"/>
-              <a:t>2025. 06. 15.</a:t>
+              <a:t>2025. 06. 16.</a:t>
             </a:fld>
             <a:endParaRPr lang="hu-HU"/>
           </a:p>
@@ -2400,7 +2405,7 @@
           <a:p>
             <a:fld id="{3C21C414-9264-472F-8F44-4AC08CBAF0ED}" type="datetimeFigureOut">
               <a:rPr lang="hu-HU" smtClean="0"/>
-              <a:t>2025. 06. 15.</a:t>
+              <a:t>2025. 06. 16.</a:t>
             </a:fld>
             <a:endParaRPr lang="hu-HU"/>
           </a:p>
@@ -2689,7 +2694,7 @@
           <a:p>
             <a:fld id="{3C21C414-9264-472F-8F44-4AC08CBAF0ED}" type="datetimeFigureOut">
               <a:rPr lang="hu-HU" smtClean="0"/>
-              <a:t>2025. 06. 15.</a:t>
+              <a:t>2025. 06. 16.</a:t>
             </a:fld>
             <a:endParaRPr lang="hu-HU"/>
           </a:p>
@@ -2932,7 +2937,7 @@
           <a:p>
             <a:fld id="{3C21C414-9264-472F-8F44-4AC08CBAF0ED}" type="datetimeFigureOut">
               <a:rPr lang="hu-HU" smtClean="0"/>
-              <a:t>2025. 06. 15.</a:t>
+              <a:t>2025. 06. 16.</a:t>
             </a:fld>
             <a:endParaRPr lang="hu-HU"/>
           </a:p>
@@ -3495,7 +3500,7 @@
           </p:blipFill>
           <p:spPr bwMode="auto">
             <a:xfrm>
-              <a:off x="5556484" y="3429545"/>
+              <a:off x="5553494" y="3361092"/>
               <a:ext cx="1447800" cy="400050"/>
             </a:xfrm>
             <a:prstGeom prst="rect">
@@ -4951,6 +4956,8 @@
                   <a:solidFill>
                     <a:schemeClr val="bg1"/>
                   </a:solidFill>
+                  <a:latin typeface="Cascadia Code" panose="020B0609020000020004" pitchFamily="49" charset="0"/>
+                  <a:cs typeface="Cascadia Code" panose="020B0609020000020004" pitchFamily="49" charset="0"/>
                 </a:rPr>
                 <a:t>First the game initializes our border walls</a:t>
               </a:r>
@@ -4959,6 +4966,8 @@
                   <a:solidFill>
                     <a:schemeClr val="bg1"/>
                   </a:solidFill>
+                  <a:latin typeface="Cascadia Code" panose="020B0609020000020004" pitchFamily="49" charset="0"/>
+                  <a:cs typeface="Cascadia Code" panose="020B0609020000020004" pitchFamily="49" charset="0"/>
                 </a:rPr>
               </a:br>
               <a:br>
@@ -4966,6 +4975,8 @@
                   <a:solidFill>
                     <a:schemeClr val="bg1"/>
                   </a:solidFill>
+                  <a:latin typeface="Cascadia Code" panose="020B0609020000020004" pitchFamily="49" charset="0"/>
+                  <a:cs typeface="Cascadia Code" panose="020B0609020000020004" pitchFamily="49" charset="0"/>
                 </a:rPr>
               </a:br>
               <a:r>
@@ -4973,6 +4984,8 @@
                   <a:solidFill>
                     <a:schemeClr val="bg1"/>
                   </a:solidFill>
+                  <a:latin typeface="Cascadia Code" panose="020B0609020000020004" pitchFamily="49" charset="0"/>
+                  <a:cs typeface="Cascadia Code" panose="020B0609020000020004" pitchFamily="49" charset="0"/>
                 </a:rPr>
                 <a:t>This creates our current room</a:t>
               </a:r>
@@ -4990,13 +5003,13 @@
   <p:clrMapOvr>
     <a:masterClrMapping/>
   </p:clrMapOvr>
-  <mc:AlternateContent xmlns:mc="http://schemas.openxmlformats.org/markup-compatibility/2006">
-    <mc:Choice xmlns:p159="http://schemas.microsoft.com/office/powerpoint/2015/09/main" Requires="p159">
+  <mc:AlternateContent xmlns:mc="http://schemas.openxmlformats.org/markup-compatibility/2006" xmlns:p159="http://schemas.microsoft.com/office/powerpoint/2015/09/main">
+    <mc:Choice Requires="p159">
       <p:transition xmlns:p14="http://schemas.microsoft.com/office/powerpoint/2010/main" spd="slow" p14:dur="2000">
         <p159:morph option="byObject"/>
       </p:transition>
     </mc:Choice>
-    <mc:Fallback>
+    <mc:Fallback xmlns="">
       <p:transition spd="slow">
         <p:fade/>
       </p:transition>
@@ -5787,9 +5800,9 @@
         </p:nvGrpSpPr>
         <p:grpSpPr>
           <a:xfrm>
-            <a:off x="3625403" y="940158"/>
+            <a:off x="3625403" y="945086"/>
             <a:ext cx="4941191" cy="4232322"/>
-            <a:chOff x="3625403" y="940158"/>
+            <a:chOff x="3625403" y="945086"/>
             <a:chExt cx="4941191" cy="4232322"/>
           </a:xfrm>
         </p:grpSpPr>
@@ -5854,8 +5867,8 @@
           </p:nvCxnSpPr>
           <p:spPr>
             <a:xfrm flipH="1" flipV="1">
-              <a:off x="5724659" y="940158"/>
-              <a:ext cx="371340" cy="1448121"/>
+              <a:off x="5690863" y="945086"/>
+              <a:ext cx="405137" cy="1448121"/>
             </a:xfrm>
             <a:prstGeom prst="straightConnector1">
               <a:avLst/>
@@ -5987,8 +6000,8 @@
           </p:nvCxnSpPr>
           <p:spPr>
             <a:xfrm>
-              <a:off x="7031541" y="4164900"/>
-              <a:ext cx="1017755" cy="1007580"/>
+              <a:off x="7055441" y="4224609"/>
+              <a:ext cx="960059" cy="952799"/>
             </a:xfrm>
             <a:prstGeom prst="straightConnector1">
               <a:avLst/>
@@ -6073,8 +6086,8 @@
           </p:nvSpPr>
           <p:spPr>
             <a:xfrm>
-              <a:off x="4772942" y="2388279"/>
-              <a:ext cx="2646113" cy="2081441"/>
+              <a:off x="4739146" y="2393207"/>
+              <a:ext cx="2713708" cy="2145621"/>
             </a:xfrm>
             <a:prstGeom prst="ellipse">
               <a:avLst/>
@@ -6110,18 +6123,15 @@
             <a:p>
               <a:pPr algn="ctr"/>
               <a:r>
-                <a:rPr lang="hu-HU">
+                <a:rPr lang="hu-HU" dirty="0">
                   <a:solidFill>
                     <a:schemeClr val="bg1"/>
                   </a:solidFill>
+                  <a:latin typeface="Cascadia Code" panose="020B0609020000020004" pitchFamily="49" charset="0"/>
+                  <a:cs typeface="Cascadia Code" panose="020B0609020000020004" pitchFamily="49" charset="0"/>
                 </a:rPr>
                 <a:t>Then the game creates the inner walls randomly, with random patterns</a:t>
               </a:r>
-              <a:endParaRPr lang="hu-HU" dirty="0">
-                <a:solidFill>
-                  <a:schemeClr val="bg1"/>
-                </a:solidFill>
-              </a:endParaRPr>
             </a:p>
           </p:txBody>
         </p:sp>
@@ -6136,13 +6146,13 @@
   <p:clrMapOvr>
     <a:masterClrMapping/>
   </p:clrMapOvr>
-  <mc:AlternateContent xmlns:mc="http://schemas.openxmlformats.org/markup-compatibility/2006">
-    <mc:Choice xmlns:p159="http://schemas.microsoft.com/office/powerpoint/2015/09/main" Requires="p159">
+  <mc:AlternateContent xmlns:mc="http://schemas.openxmlformats.org/markup-compatibility/2006" xmlns:p159="http://schemas.microsoft.com/office/powerpoint/2015/09/main">
+    <mc:Choice Requires="p159">
       <p:transition xmlns:p14="http://schemas.microsoft.com/office/powerpoint/2010/main" spd="slow" p14:dur="2000">
         <p159:morph option="byObject"/>
       </p:transition>
     </mc:Choice>
-    <mc:Fallback>
+    <mc:Fallback xmlns="">
       <p:transition spd="slow">
         <p:fade/>
       </p:transition>
@@ -6358,6 +6368,8 @@
                   <a:solidFill>
                     <a:schemeClr val="bg1"/>
                   </a:solidFill>
+                  <a:latin typeface="Cascadia Code" panose="020B0609020000020004" pitchFamily="49" charset="0"/>
+                  <a:cs typeface="Cascadia Code" panose="020B0609020000020004" pitchFamily="49" charset="0"/>
                 </a:rPr>
                 <a:t>Our player spawns in a random location</a:t>
               </a:r>
@@ -6539,6 +6551,8 @@
                     <a:solidFill>
                       <a:schemeClr val="bg1"/>
                     </a:solidFill>
+                    <a:latin typeface="Cascadia Code" panose="020B0609020000020004" pitchFamily="49" charset="0"/>
+                    <a:cs typeface="Cascadia Code" panose="020B0609020000020004" pitchFamily="49" charset="0"/>
                   </a:rPr>
                   <a:t>The game creates a field where items and enemies can’t spawn</a:t>
                 </a:r>
@@ -6624,6 +6638,8 @@
                   <a:solidFill>
                     <a:schemeClr val="bg1"/>
                   </a:solidFill>
+                  <a:latin typeface="Cascadia Code" panose="020B0609020000020004" pitchFamily="49" charset="0"/>
+                  <a:cs typeface="Cascadia Code" panose="020B0609020000020004" pitchFamily="49" charset="0"/>
                 </a:rPr>
                 <a:t>The player can move in any directions</a:t>
               </a:r>
@@ -6645,8 +6661,8 @@
         </p:nvSpPr>
         <p:spPr>
           <a:xfrm>
-            <a:off x="5110094" y="2824885"/>
-            <a:ext cx="1971809" cy="1200329"/>
+            <a:off x="4543517" y="2849858"/>
+            <a:ext cx="2748251" cy="1200329"/>
           </a:xfrm>
           <a:prstGeom prst="rect">
             <a:avLst/>
@@ -6665,6 +6681,8 @@
                 <a:solidFill>
                   <a:schemeClr val="bg1"/>
                 </a:solidFill>
+                <a:latin typeface="Cascadia Code" panose="020B0609020000020004" pitchFamily="49" charset="0"/>
+                <a:cs typeface="Cascadia Code" panose="020B0609020000020004" pitchFamily="49" charset="0"/>
               </a:rPr>
               <a:t>Then the game creates different assets around the map randomly</a:t>
             </a:r>
@@ -6685,9 +6703,9 @@
         </p:nvGrpSpPr>
         <p:grpSpPr>
           <a:xfrm>
-            <a:off x="1107583" y="2228045"/>
+            <a:off x="1119143" y="2240284"/>
             <a:ext cx="3312016" cy="3457978"/>
-            <a:chOff x="1107583" y="2228045"/>
+            <a:chOff x="1119143" y="2240284"/>
             <a:chExt cx="3312016" cy="3457978"/>
           </a:xfrm>
         </p:grpSpPr>
@@ -6705,8 +6723,8 @@
           </p:nvSpPr>
           <p:spPr>
             <a:xfrm>
-              <a:off x="1107583" y="2891307"/>
-              <a:ext cx="1893194" cy="646331"/>
+              <a:off x="1119143" y="2903546"/>
+              <a:ext cx="2212526" cy="646331"/>
             </a:xfrm>
             <a:prstGeom prst="rect">
               <a:avLst/>
@@ -6725,6 +6743,8 @@
                   <a:solidFill>
                     <a:schemeClr val="bg1"/>
                   </a:solidFill>
+                  <a:latin typeface="Cascadia Code" panose="020B0609020000020004" pitchFamily="49" charset="0"/>
+                  <a:cs typeface="Cascadia Code" panose="020B0609020000020004" pitchFamily="49" charset="0"/>
                 </a:rPr>
                 <a:t>Different kinds of weapons</a:t>
               </a:r>
@@ -6748,8 +6768,8 @@
           </p:nvCxnSpPr>
           <p:spPr>
             <a:xfrm flipV="1">
-              <a:off x="2054180" y="2228045"/>
-              <a:ext cx="553792" cy="663262"/>
+              <a:off x="2225406" y="2240284"/>
+              <a:ext cx="394126" cy="663262"/>
             </a:xfrm>
             <a:prstGeom prst="straightConnector1">
               <a:avLst/>
@@ -6793,8 +6813,8 @@
           </p:nvCxnSpPr>
           <p:spPr>
             <a:xfrm flipH="1">
-              <a:off x="1107583" y="3537638"/>
-              <a:ext cx="946597" cy="2148385"/>
+              <a:off x="1119143" y="3549877"/>
+              <a:ext cx="1106263" cy="2148385"/>
             </a:xfrm>
             <a:prstGeom prst="straightConnector1">
               <a:avLst/>
@@ -6838,8 +6858,8 @@
           </p:nvCxnSpPr>
           <p:spPr>
             <a:xfrm flipV="1">
-              <a:off x="3000777" y="3105834"/>
-              <a:ext cx="1418822" cy="108639"/>
+              <a:off x="3331669" y="3118073"/>
+              <a:ext cx="1099490" cy="108639"/>
             </a:xfrm>
             <a:prstGeom prst="straightConnector1">
               <a:avLst/>
@@ -6882,9 +6902,9 @@
         <p:grpSpPr>
           <a:xfrm>
             <a:off x="8918620" y="1182469"/>
-            <a:ext cx="2386883" cy="646331"/>
+            <a:ext cx="2739979" cy="646331"/>
             <a:chOff x="8918620" y="1182469"/>
-            <a:chExt cx="2386883" cy="646331"/>
+            <a:chExt cx="2739979" cy="646331"/>
           </a:xfrm>
         </p:grpSpPr>
         <p:sp>
@@ -6901,8 +6921,8 @@
           </p:nvSpPr>
           <p:spPr>
             <a:xfrm>
-              <a:off x="9412309" y="1182469"/>
-              <a:ext cx="1893194" cy="646331"/>
+              <a:off x="9412308" y="1182469"/>
+              <a:ext cx="2246291" cy="646331"/>
             </a:xfrm>
             <a:prstGeom prst="rect">
               <a:avLst/>
@@ -6921,6 +6941,8 @@
                   <a:solidFill>
                     <a:schemeClr val="bg1"/>
                   </a:solidFill>
+                  <a:latin typeface="Cascadia Code" panose="020B0609020000020004" pitchFamily="49" charset="0"/>
+                  <a:cs typeface="Cascadia Code" panose="020B0609020000020004" pitchFamily="49" charset="0"/>
                 </a:rPr>
                 <a:t>Different kinds of monsters</a:t>
               </a:r>
@@ -6945,7 +6967,7 @@
           <p:spPr>
             <a:xfrm flipH="1">
               <a:off x="8918620" y="1505635"/>
-              <a:ext cx="493689" cy="226888"/>
+              <a:ext cx="493688" cy="226888"/>
             </a:xfrm>
             <a:prstGeom prst="straightConnector1">
               <a:avLst/>
@@ -7027,6 +7049,8 @@
                   <a:solidFill>
                     <a:schemeClr val="bg1"/>
                   </a:solidFill>
+                  <a:latin typeface="Cascadia Code" panose="020B0609020000020004" pitchFamily="49" charset="0"/>
+                  <a:cs typeface="Cascadia Code" panose="020B0609020000020004" pitchFamily="49" charset="0"/>
                 </a:rPr>
                 <a:t>Treasures</a:t>
               </a:r>
@@ -7220,6 +7244,8 @@
                   <a:solidFill>
                     <a:schemeClr val="bg1"/>
                   </a:solidFill>
+                  <a:latin typeface="Cascadia Code" panose="020B0609020000020004" pitchFamily="49" charset="0"/>
+                  <a:cs typeface="Cascadia Code" panose="020B0609020000020004" pitchFamily="49" charset="0"/>
                 </a:rPr>
                 <a:t>Differently colored keys</a:t>
               </a:r>
@@ -7330,10 +7356,10 @@
         </p:nvGrpSpPr>
         <p:grpSpPr>
           <a:xfrm>
-            <a:off x="5321798" y="4185411"/>
-            <a:ext cx="2926985" cy="2394840"/>
-            <a:chOff x="5321798" y="4185411"/>
-            <a:chExt cx="2926985" cy="2394840"/>
+            <a:off x="4718050" y="4185411"/>
+            <a:ext cx="3530733" cy="2394840"/>
+            <a:chOff x="4718050" y="4185411"/>
+            <a:chExt cx="3530733" cy="2394840"/>
           </a:xfrm>
         </p:grpSpPr>
         <p:sp>
@@ -7350,8 +7376,8 @@
           </p:nvSpPr>
           <p:spPr>
             <a:xfrm>
-              <a:off x="5321798" y="5522370"/>
-              <a:ext cx="2858299" cy="923330"/>
+              <a:off x="4718050" y="5522370"/>
+              <a:ext cx="3462048" cy="923330"/>
             </a:xfrm>
             <a:prstGeom prst="rect">
               <a:avLst/>
@@ -7369,6 +7395,8 @@
                   <a:solidFill>
                     <a:schemeClr val="bg1"/>
                   </a:solidFill>
+                  <a:latin typeface="Cascadia Code" panose="020B0609020000020004" pitchFamily="49" charset="0"/>
+                  <a:cs typeface="Cascadia Code" panose="020B0609020000020004" pitchFamily="49" charset="0"/>
                 </a:rPr>
                 <a:t>Exits get generated depending on what color keys are on the map</a:t>
               </a:r>
@@ -7479,9 +7507,9 @@
         <p:grpSpPr>
           <a:xfrm>
             <a:off x="2741392" y="5019608"/>
-            <a:ext cx="1893194" cy="1035747"/>
+            <a:ext cx="1893194" cy="1312746"/>
             <a:chOff x="2741392" y="5019608"/>
-            <a:chExt cx="1893194" cy="1035747"/>
+            <a:chExt cx="1893194" cy="1312746"/>
           </a:xfrm>
         </p:grpSpPr>
         <p:sp>
@@ -7499,7 +7527,7 @@
           <p:spPr>
             <a:xfrm>
               <a:off x="2741392" y="5686023"/>
-              <a:ext cx="1893194" cy="369332"/>
+              <a:ext cx="1893194" cy="646331"/>
             </a:xfrm>
             <a:prstGeom prst="rect">
               <a:avLst/>
@@ -7518,6 +7546,8 @@
                   <a:solidFill>
                     <a:schemeClr val="bg1"/>
                   </a:solidFill>
+                  <a:latin typeface="Cascadia Code" panose="020B0609020000020004" pitchFamily="49" charset="0"/>
+                  <a:cs typeface="Cascadia Code" panose="020B0609020000020004" pitchFamily="49" charset="0"/>
                 </a:rPr>
                 <a:t>Health potions</a:t>
               </a:r>
@@ -7627,8 +7657,8 @@
         </p:nvSpPr>
         <p:spPr>
           <a:xfrm>
-            <a:off x="5054957" y="2804636"/>
-            <a:ext cx="2087049" cy="1477328"/>
+            <a:off x="4550423" y="2686386"/>
+            <a:ext cx="2748252" cy="1477328"/>
           </a:xfrm>
           <a:prstGeom prst="rect">
             <a:avLst/>
@@ -7647,6 +7677,8 @@
                 <a:solidFill>
                   <a:schemeClr val="bg1"/>
                 </a:solidFill>
+                <a:latin typeface="Cascadia Code" panose="020B0609020000020004" pitchFamily="49" charset="0"/>
+                <a:cs typeface="Cascadia Code" panose="020B0609020000020004" pitchFamily="49" charset="0"/>
               </a:rPr>
               <a:t>These assets get placed randomly around the map in every room that the player enters</a:t>
             </a:r>
@@ -7663,13 +7695,13 @@
   <p:clrMapOvr>
     <a:masterClrMapping/>
   </p:clrMapOvr>
-  <mc:AlternateContent xmlns:mc="http://schemas.openxmlformats.org/markup-compatibility/2006">
-    <mc:Choice xmlns:p159="http://schemas.microsoft.com/office/powerpoint/2015/09/main" Requires="p159">
+  <mc:AlternateContent xmlns:mc="http://schemas.openxmlformats.org/markup-compatibility/2006" xmlns:p159="http://schemas.microsoft.com/office/powerpoint/2015/09/main">
+    <mc:Choice Requires="p159">
       <p:transition xmlns:p14="http://schemas.microsoft.com/office/powerpoint/2010/main" spd="slow" p14:dur="2000">
         <p159:morph option="byObject"/>
       </p:transition>
     </mc:Choice>
-    <mc:Fallback>
+    <mc:Fallback xmlns="">
       <p:transition spd="slow">
         <p:fade/>
       </p:transition>
@@ -8863,8 +8895,8 @@
         </p:nvSpPr>
         <p:spPr>
           <a:xfrm>
-            <a:off x="10026428" y="3185682"/>
-            <a:ext cx="1688123" cy="923330"/>
+            <a:off x="9883864" y="3164600"/>
+            <a:ext cx="2038350" cy="923330"/>
           </a:xfrm>
           <a:prstGeom prst="rect">
             <a:avLst/>
@@ -8883,6 +8915,8 @@
                 <a:solidFill>
                   <a:schemeClr val="bg1"/>
                 </a:solidFill>
+                <a:latin typeface="Cascadia Code" panose="020B0609020000020004" pitchFamily="49" charset="0"/>
+                <a:cs typeface="Cascadia Code" panose="020B0609020000020004" pitchFamily="49" charset="0"/>
               </a:rPr>
               <a:t>Here we can see different UI elements </a:t>
             </a:r>
@@ -8903,9 +8937,9 @@
         </p:nvGrpSpPr>
         <p:grpSpPr>
           <a:xfrm>
-            <a:off x="9614077" y="0"/>
+            <a:off x="9614079" y="0"/>
             <a:ext cx="2577921" cy="5215944"/>
-            <a:chOff x="9614077" y="0"/>
+            <a:chOff x="10952718" y="-50800"/>
             <a:chExt cx="2577921" cy="5215944"/>
           </a:xfrm>
         </p:grpSpPr>
@@ -8923,8 +8957,8 @@
           </p:nvSpPr>
           <p:spPr>
             <a:xfrm>
-              <a:off x="9764256" y="2140174"/>
-              <a:ext cx="2212465" cy="923330"/>
+              <a:off x="11000343" y="2059915"/>
+              <a:ext cx="2482670" cy="923330"/>
             </a:xfrm>
             <a:prstGeom prst="rect">
               <a:avLst/>
@@ -8946,6 +8980,8 @@
                   <a:solidFill>
                     <a:schemeClr val="bg1"/>
                   </a:solidFill>
+                  <a:latin typeface="Cascadia Code" panose="020B0609020000020004" pitchFamily="49" charset="0"/>
+                  <a:cs typeface="Cascadia Code" panose="020B0609020000020004" pitchFamily="49" charset="0"/>
                 </a:rPr>
                 <a:t>Inventory, where your items will appear</a:t>
               </a:r>
@@ -8966,7 +9002,7 @@
           </p:nvSpPr>
           <p:spPr>
             <a:xfrm>
-              <a:off x="9614077" y="0"/>
+              <a:off x="10952718" y="-50800"/>
               <a:ext cx="2577921" cy="5215944"/>
             </a:xfrm>
             <a:prstGeom prst="rect">
@@ -9118,6 +9154,8 @@
                   <a:solidFill>
                     <a:schemeClr val="bg1"/>
                   </a:solidFill>
+                  <a:latin typeface="Cascadia Code" panose="020B0609020000020004" pitchFamily="49" charset="0"/>
+                  <a:cs typeface="Cascadia Code" panose="020B0609020000020004" pitchFamily="49" charset="0"/>
                 </a:rPr>
                 <a:t>Your stats during the game</a:t>
               </a:r>
@@ -9213,8 +9251,8 @@
           </p:nvSpPr>
           <p:spPr>
             <a:xfrm>
-              <a:off x="10291292" y="4292614"/>
-              <a:ext cx="1223493" cy="923330"/>
+              <a:off x="10193985" y="4292614"/>
+              <a:ext cx="1418108" cy="923330"/>
             </a:xfrm>
             <a:prstGeom prst="rect">
               <a:avLst/>
@@ -9236,6 +9274,8 @@
                   <a:solidFill>
                     <a:schemeClr val="bg1"/>
                   </a:solidFill>
+                  <a:latin typeface="Cascadia Code" panose="020B0609020000020004" pitchFamily="49" charset="0"/>
+                  <a:cs typeface="Cascadia Code" panose="020B0609020000020004" pitchFamily="49" charset="0"/>
                 </a:rPr>
                 <a:t>Different menu options</a:t>
               </a:r>
@@ -9257,8 +9297,8 @@
         </p:nvSpPr>
         <p:spPr>
           <a:xfrm>
-            <a:off x="9972538" y="3063504"/>
-            <a:ext cx="1860997" cy="1200329"/>
+            <a:off x="9661703" y="3026100"/>
+            <a:ext cx="2482671" cy="1200329"/>
           </a:xfrm>
           <a:prstGeom prst="rect">
             <a:avLst/>
@@ -9277,6 +9317,8 @@
                 <a:solidFill>
                   <a:schemeClr val="bg1"/>
                 </a:solidFill>
+                <a:latin typeface="Cascadia Code" panose="020B0609020000020004" pitchFamily="49" charset="0"/>
+                <a:cs typeface="Cascadia Code" panose="020B0609020000020004" pitchFamily="49" charset="0"/>
               </a:rPr>
               <a:t>All UI elements dinamically change as the game goes on</a:t>
             </a:r>
@@ -10050,6 +10092,8 @@
                 <a:solidFill>
                   <a:schemeClr val="bg1"/>
                 </a:solidFill>
+                <a:latin typeface="Cascadia Code" panose="020B0609020000020004" pitchFamily="49" charset="0"/>
+                <a:cs typeface="Cascadia Code" panose="020B0609020000020004" pitchFamily="49" charset="0"/>
               </a:rPr>
               <a:t>Let’s see the game shall we?</a:t>
             </a:r>
@@ -10066,13 +10110,13 @@
   <p:clrMapOvr>
     <a:masterClrMapping/>
   </p:clrMapOvr>
-  <mc:AlternateContent xmlns:mc="http://schemas.openxmlformats.org/markup-compatibility/2006">
-    <mc:Choice xmlns:p159="http://schemas.microsoft.com/office/powerpoint/2015/09/main" Requires="p159">
+  <mc:AlternateContent xmlns:mc="http://schemas.openxmlformats.org/markup-compatibility/2006" xmlns:p159="http://schemas.microsoft.com/office/powerpoint/2015/09/main">
+    <mc:Choice Requires="p159">
       <p:transition xmlns:p14="http://schemas.microsoft.com/office/powerpoint/2010/main" spd="slow" p14:dur="2000">
         <p159:morph option="byObject"/>
       </p:transition>
     </mc:Choice>
-    <mc:Fallback>
+    <mc:Fallback xmlns="">
       <p:transition spd="slow">
         <p:fade/>
       </p:transition>
@@ -10518,8 +10562,8 @@
         </p:nvSpPr>
         <p:spPr>
           <a:xfrm>
-            <a:off x="4654060" y="3324181"/>
-            <a:ext cx="2883877" cy="646331"/>
+            <a:off x="4466979" y="3324181"/>
+            <a:ext cx="3258040" cy="646331"/>
           </a:xfrm>
           <a:prstGeom prst="rect">
             <a:avLst/>
@@ -10538,6 +10582,8 @@
                 <a:solidFill>
                   <a:schemeClr val="bg1"/>
                 </a:solidFill>
+                <a:latin typeface="Cascadia Code" panose="020B0609020000020004" pitchFamily="49" charset="0"/>
+                <a:cs typeface="Cascadia Code" panose="020B0609020000020004" pitchFamily="49" charset="0"/>
               </a:rPr>
               <a:t>If you have any questions ask them now!</a:t>
             </a:r>
@@ -10554,13 +10600,13 @@
   <p:clrMapOvr>
     <a:masterClrMapping/>
   </p:clrMapOvr>
-  <mc:AlternateContent xmlns:mc="http://schemas.openxmlformats.org/markup-compatibility/2006">
-    <mc:Choice xmlns:p159="http://schemas.microsoft.com/office/powerpoint/2015/09/main" Requires="p159">
+  <mc:AlternateContent xmlns:mc="http://schemas.openxmlformats.org/markup-compatibility/2006" xmlns:p159="http://schemas.microsoft.com/office/powerpoint/2015/09/main">
+    <mc:Choice Requires="p159">
       <p:transition xmlns:p14="http://schemas.microsoft.com/office/powerpoint/2010/main" spd="slow" p14:dur="2000">
         <p159:morph option="byObject"/>
       </p:transition>
     </mc:Choice>
-    <mc:Fallback>
+    <mc:Fallback xmlns="">
       <p:transition spd="slow">
         <p:fade/>
       </p:transition>
